--- a/17 18 20/2 Tableau/6.Data Modeling/3.Relationship/Relationship.pptx
+++ b/17 18 20/2 Tableau/6.Data Modeling/3.Relationship/Relationship.pptx
@@ -198,7 +198,7 @@
           <a:p>
             <a:fld id="{B17773B0-9C71-4C42-839B-CED3341CD232}" type="datetimeFigureOut">
               <a:rPr lang="en-IN" smtClean="0"/>
-              <a:t>22-07-2026</a:t>
+              <a:t>28-07-2026</a:t>
             </a:fld>
             <a:endParaRPr lang="en-IN"/>
           </a:p>
@@ -652,7 +652,7 @@
           <a:p>
             <a:fld id="{DC8321A5-74C1-4574-A6AA-F1EDDDF12D9F}" type="datetimeFigureOut">
               <a:rPr lang="en-IN" smtClean="0"/>
-              <a:t>22-07-2026</a:t>
+              <a:t>28-07-2026</a:t>
             </a:fld>
             <a:endParaRPr lang="en-IN"/>
           </a:p>
@@ -927,7 +927,7 @@
           <a:p>
             <a:fld id="{DC8321A5-74C1-4574-A6AA-F1EDDDF12D9F}" type="datetimeFigureOut">
               <a:rPr lang="en-IN" smtClean="0"/>
-              <a:t>22-07-2026</a:t>
+              <a:t>28-07-2026</a:t>
             </a:fld>
             <a:endParaRPr lang="en-IN"/>
           </a:p>
@@ -1121,7 +1121,7 @@
           <a:p>
             <a:fld id="{DC8321A5-74C1-4574-A6AA-F1EDDDF12D9F}" type="datetimeFigureOut">
               <a:rPr lang="en-IN" smtClean="0"/>
-              <a:t>22-07-2026</a:t>
+              <a:t>28-07-2026</a:t>
             </a:fld>
             <a:endParaRPr lang="en-IN"/>
           </a:p>
@@ -1394,7 +1394,7 @@
           <a:p>
             <a:fld id="{DC8321A5-74C1-4574-A6AA-F1EDDDF12D9F}" type="datetimeFigureOut">
               <a:rPr lang="en-IN" smtClean="0"/>
-              <a:t>22-07-2026</a:t>
+              <a:t>28-07-2026</a:t>
             </a:fld>
             <a:endParaRPr lang="en-IN"/>
           </a:p>
@@ -1735,7 +1735,7 @@
           <a:p>
             <a:fld id="{DC8321A5-74C1-4574-A6AA-F1EDDDF12D9F}" type="datetimeFigureOut">
               <a:rPr lang="en-IN" smtClean="0"/>
-              <a:t>22-07-2026</a:t>
+              <a:t>28-07-2026</a:t>
             </a:fld>
             <a:endParaRPr lang="en-IN"/>
           </a:p>
@@ -2358,7 +2358,7 @@
           <a:p>
             <a:fld id="{DC8321A5-74C1-4574-A6AA-F1EDDDF12D9F}" type="datetimeFigureOut">
               <a:rPr lang="en-IN" smtClean="0"/>
-              <a:t>22-07-2026</a:t>
+              <a:t>28-07-2026</a:t>
             </a:fld>
             <a:endParaRPr lang="en-IN"/>
           </a:p>
@@ -3218,7 +3218,7 @@
           <a:p>
             <a:fld id="{DC8321A5-74C1-4574-A6AA-F1EDDDF12D9F}" type="datetimeFigureOut">
               <a:rPr lang="en-IN" smtClean="0"/>
-              <a:t>22-07-2026</a:t>
+              <a:t>28-07-2026</a:t>
             </a:fld>
             <a:endParaRPr lang="en-IN"/>
           </a:p>
@@ -3388,7 +3388,7 @@
           <a:p>
             <a:fld id="{DC8321A5-74C1-4574-A6AA-F1EDDDF12D9F}" type="datetimeFigureOut">
               <a:rPr lang="en-IN" smtClean="0"/>
-              <a:t>22-07-2026</a:t>
+              <a:t>28-07-2026</a:t>
             </a:fld>
             <a:endParaRPr lang="en-IN"/>
           </a:p>
@@ -3568,7 +3568,7 @@
           <a:p>
             <a:fld id="{DC8321A5-74C1-4574-A6AA-F1EDDDF12D9F}" type="datetimeFigureOut">
               <a:rPr lang="en-IN" smtClean="0"/>
-              <a:t>22-07-2026</a:t>
+              <a:t>28-07-2026</a:t>
             </a:fld>
             <a:endParaRPr lang="en-IN"/>
           </a:p>
@@ -3738,7 +3738,7 @@
           <a:p>
             <a:fld id="{DC8321A5-74C1-4574-A6AA-F1EDDDF12D9F}" type="datetimeFigureOut">
               <a:rPr lang="en-IN" smtClean="0"/>
-              <a:t>22-07-2026</a:t>
+              <a:t>28-07-2026</a:t>
             </a:fld>
             <a:endParaRPr lang="en-IN"/>
           </a:p>
@@ -3985,7 +3985,7 @@
           <a:p>
             <a:fld id="{DC8321A5-74C1-4574-A6AA-F1EDDDF12D9F}" type="datetimeFigureOut">
               <a:rPr lang="en-IN" smtClean="0"/>
-              <a:t>22-07-2026</a:t>
+              <a:t>28-07-2026</a:t>
             </a:fld>
             <a:endParaRPr lang="en-IN"/>
           </a:p>
@@ -4277,7 +4277,7 @@
           <a:p>
             <a:fld id="{DC8321A5-74C1-4574-A6AA-F1EDDDF12D9F}" type="datetimeFigureOut">
               <a:rPr lang="en-IN" smtClean="0"/>
-              <a:t>22-07-2026</a:t>
+              <a:t>28-07-2026</a:t>
             </a:fld>
             <a:endParaRPr lang="en-IN"/>
           </a:p>
@@ -4721,7 +4721,7 @@
           <a:p>
             <a:fld id="{DC8321A5-74C1-4574-A6AA-F1EDDDF12D9F}" type="datetimeFigureOut">
               <a:rPr lang="en-IN" smtClean="0"/>
-              <a:t>22-07-2026</a:t>
+              <a:t>28-07-2026</a:t>
             </a:fld>
             <a:endParaRPr lang="en-IN"/>
           </a:p>
@@ -4839,7 +4839,7 @@
           <a:p>
             <a:fld id="{DC8321A5-74C1-4574-A6AA-F1EDDDF12D9F}" type="datetimeFigureOut">
               <a:rPr lang="en-IN" smtClean="0"/>
-              <a:t>22-07-2026</a:t>
+              <a:t>28-07-2026</a:t>
             </a:fld>
             <a:endParaRPr lang="en-IN"/>
           </a:p>
@@ -4934,7 +4934,7 @@
           <a:p>
             <a:fld id="{DC8321A5-74C1-4574-A6AA-F1EDDDF12D9F}" type="datetimeFigureOut">
               <a:rPr lang="en-IN" smtClean="0"/>
-              <a:t>22-07-2026</a:t>
+              <a:t>28-07-2026</a:t>
             </a:fld>
             <a:endParaRPr lang="en-IN"/>
           </a:p>
@@ -5213,7 +5213,7 @@
           <a:p>
             <a:fld id="{DC8321A5-74C1-4574-A6AA-F1EDDDF12D9F}" type="datetimeFigureOut">
               <a:rPr lang="en-IN" smtClean="0"/>
-              <a:t>22-07-2026</a:t>
+              <a:t>28-07-2026</a:t>
             </a:fld>
             <a:endParaRPr lang="en-IN"/>
           </a:p>
@@ -5488,7 +5488,7 @@
           <a:p>
             <a:fld id="{DC8321A5-74C1-4574-A6AA-F1EDDDF12D9F}" type="datetimeFigureOut">
               <a:rPr lang="en-IN" smtClean="0"/>
-              <a:t>22-07-2026</a:t>
+              <a:t>28-07-2026</a:t>
             </a:fld>
             <a:endParaRPr lang="en-IN"/>
           </a:p>
@@ -5917,7 +5917,7 @@
           <a:p>
             <a:fld id="{DC8321A5-74C1-4574-A6AA-F1EDDDF12D9F}" type="datetimeFigureOut">
               <a:rPr lang="en-IN" smtClean="0"/>
-              <a:t>22-07-2026</a:t>
+              <a:t>28-07-2026</a:t>
             </a:fld>
             <a:endParaRPr lang="en-IN"/>
           </a:p>
@@ -6503,7 +6503,7 @@
         <p:spPr>
           <a:xfrm>
             <a:off x="719823" y="750011"/>
-            <a:ext cx="1582484" cy="923330"/>
+            <a:ext cx="1451038" cy="646331"/>
           </a:xfrm>
           <a:prstGeom prst="rect">
             <a:avLst/>
@@ -6527,17 +6527,17 @@
               <a:rPr lang="en-US" dirty="0" smtClean="0">
                 <a:latin typeface="Candara" panose="020E0502030303020204" pitchFamily="34" charset="0"/>
               </a:rPr>
-              <a:t>One to One</a:t>
-            </a:r>
-          </a:p>
-          <a:p>
+              <a:t>One to </a:t>
+            </a:r>
             <a:r>
               <a:rPr lang="en-US" dirty="0" smtClean="0">
                 <a:latin typeface="Candara" panose="020E0502030303020204" pitchFamily="34" charset="0"/>
               </a:rPr>
-              <a:t>Many to Many</a:t>
-            </a:r>
-            <a:endParaRPr lang="en-IN" dirty="0"/>
+              <a:t>One</a:t>
+            </a:r>
+            <a:endParaRPr lang="en-US" dirty="0" smtClean="0">
+              <a:latin typeface="Candara" panose="020E0502030303020204" pitchFamily="34" charset="0"/>
+            </a:endParaRPr>
           </a:p>
         </p:txBody>
       </p:sp>
